--- a/content/W01/D2/C2_W01_D02_deck_half2_STUDENT.pptx
+++ b/content/W01/D2/C2_W01_D02_deck_half2_STUDENT.pptx
@@ -6326,7 +6326,7 @@
                 </a:solidFill>
                 <a:latin typeface="Consolas"/>
               </a:rPr>
-              <a:t>  "id": "1015",</a:t>
+              <a:t>  "id": "KR4214",</a:t>
             </a:r>
           </a:p>
           <a:p>
@@ -6358,7 +6358,7 @@
                 </a:solidFill>
                 <a:latin typeface="Consolas"/>
               </a:rPr>
-              <a:t>  "source": {"system": "feed_01", "amount_raw": "8400"}</a:t>
+              <a:t>  "source": {"system": "kalpa_retail_orders", "amount_raw": "8400"}</a:t>
             </a:r>
           </a:p>
           <a:p>
@@ -6390,7 +6390,7 @@
                 </a:solidFill>
                 <a:latin typeface="Calibri"/>
               </a:rPr>
-              <a:t>Record 1015 had an empty amount in the CSV. The JSON still carries the original value, one level down.</a:t>
+              <a:t>Record KR4214 had an empty amount in the CSV. The JSON still carries the original value, one level down.</a:t>
             </a:r>
           </a:p>
         </p:txBody>
@@ -7702,7 +7702,7 @@
                 </a:solidFill>
                 <a:latin typeface="Consolas"/>
               </a:rPr>
-              <a:t>writer = csv.DictWriter(f, fieldnames=["id","segment","amount","outcome","date"])</a:t>
+              <a:t>writer = csv.DictWriter(f, fieldnames=["order_id","customer_id","segment","amount","status","order_date","discount"])</a:t>
             </a:r>
           </a:p>
           <a:p>
@@ -9022,7 +9022,7 @@
                 </a:solidFill>
                 <a:latin typeface="Calibri"/>
               </a:rPr>
-              <a:t>Where the records actually come from</a:t>
+              <a:t>Where the orders actually come from</a:t>
             </a:r>
           </a:p>
         </p:txBody>
@@ -9061,7 +9061,7 @@
                 </a:solidFill>
                 <a:latin typeface="Calibri"/>
               </a:rPr>
-              <a:t>Nobody hands you a Python list. Someone sends you a file.</a:t>
+              <a:t>Nobody hands you a Python list. Kalpa Retail's order system sends you a file.</a:t>
             </a:r>
           </a:p>
           <a:p>

--- a/content/W01/D2/C2_W01_D02_deck_half2_STUDENT.pptx
+++ b/content/W01/D2/C2_W01_D02_deck_half2_STUDENT.pptx
@@ -3210,7 +3210,7 @@
         <p:spPr>
           <a:xfrm>
             <a:off x="777240" y="1965960"/>
-            <a:ext cx="10607040" cy="4206240"/>
+            <a:ext cx="10607040" cy="704088"/>
           </a:xfrm>
           <a:prstGeom prst="rect">
             <a:avLst/>
@@ -3229,7 +3229,7 @@
               </a:spcAft>
             </a:pPr>
             <a:r>
-              <a:rPr sz="2100">
+              <a:rPr sz="2100" b="0">
                 <a:solidFill>
                   <a:srgbClr val="1C1C1A"/>
                 </a:solidFill>
@@ -3248,7 +3248,7 @@
         </p:nvSpPr>
         <p:spPr>
           <a:xfrm>
-            <a:off x="777240" y="6263640"/>
+            <a:off x="777240" y="6309360"/>
             <a:ext cx="10607040" cy="365760"/>
           </a:xfrm>
           <a:prstGeom prst="rect">
@@ -3379,7 +3379,7 @@
         <p:spPr>
           <a:xfrm>
             <a:off x="777240" y="1965960"/>
-            <a:ext cx="10607040" cy="4206240"/>
+            <a:ext cx="10607040" cy="1856231"/>
           </a:xfrm>
           <a:prstGeom prst="rect">
             <a:avLst/>
@@ -3398,7 +3398,7 @@
               </a:spcAft>
             </a:pPr>
             <a:r>
-              <a:rPr sz="2100">
+              <a:rPr sz="2100" b="0">
                 <a:solidFill>
                   <a:srgbClr val="1C1C1A"/>
                 </a:solidFill>
@@ -3414,7 +3414,7 @@
               </a:spcAft>
             </a:pPr>
             <a:r>
-              <a:rPr sz="2100">
+              <a:rPr sz="2100" b="0">
                 <a:solidFill>
                   <a:srgbClr val="1C1C1A"/>
                 </a:solidFill>
@@ -3430,7 +3430,7 @@
               </a:spcAft>
             </a:pPr>
             <a:r>
-              <a:rPr sz="2100">
+              <a:rPr sz="2100" b="0">
                 <a:solidFill>
                   <a:srgbClr val="1C1C1A"/>
                 </a:solidFill>
@@ -3446,7 +3446,7 @@
               </a:spcAft>
             </a:pPr>
             <a:r>
-              <a:rPr sz="2100">
+              <a:rPr sz="2100" b="0">
                 <a:solidFill>
                   <a:srgbClr val="1C1C1A"/>
                 </a:solidFill>
@@ -3465,7 +3465,7 @@
         </p:nvSpPr>
         <p:spPr>
           <a:xfrm>
-            <a:off x="777240" y="6263640"/>
+            <a:off x="777240" y="6309360"/>
             <a:ext cx="10607040" cy="365760"/>
           </a:xfrm>
           <a:prstGeom prst="rect">
@@ -3597,7 +3597,7 @@
         <p:spPr>
           <a:xfrm>
             <a:off x="777240" y="1965960"/>
-            <a:ext cx="10607040" cy="4206240"/>
+            <a:ext cx="10607040" cy="704088"/>
           </a:xfrm>
           <a:prstGeom prst="rect">
             <a:avLst/>
@@ -3616,13 +3616,22 @@
               </a:spcAft>
             </a:pPr>
             <a:r>
-              <a:rPr sz="2100">
+              <a:rPr sz="2100" b="0">
                 <a:solidFill>
                   <a:srgbClr val="FFFFFF"/>
                 </a:solidFill>
                 <a:latin typeface="Calibri"/>
               </a:rPr>
-              <a:t>[inline cell] &gt; [packaged decision] &gt; [read the failure] &gt; [log the rejection] &gt; **[cross the boundary]**</a:t>
+              <a:t>[inline cell] &gt; [packaged decision] &gt; [read the failure] &gt; [log the rejection] &gt; </a:t>
+            </a:r>
+            <a:r>
+              <a:rPr sz="2100" b="1">
+                <a:solidFill>
+                  <a:srgbClr val="FFFFFF"/>
+                </a:solidFill>
+                <a:latin typeface="Calibri"/>
+              </a:rPr>
+              <a:t>[cross the boundary]</a:t>
             </a:r>
           </a:p>
         </p:txBody>
@@ -3635,7 +3644,7 @@
         </p:nvSpPr>
         <p:spPr>
           <a:xfrm>
-            <a:off x="777240" y="6263640"/>
+            <a:off x="777240" y="6309360"/>
             <a:ext cx="10607040" cy="365760"/>
           </a:xfrm>
           <a:prstGeom prst="rect">
@@ -3766,7 +3775,7 @@
         <p:spPr>
           <a:xfrm>
             <a:off x="777240" y="1965960"/>
-            <a:ext cx="10607040" cy="4206240"/>
+            <a:ext cx="10607040" cy="704088"/>
           </a:xfrm>
           <a:prstGeom prst="rect">
             <a:avLst/>
@@ -3785,7 +3794,7 @@
               </a:spcAft>
             </a:pPr>
             <a:r>
-              <a:rPr sz="1700">
+              <a:rPr sz="1700" b="0">
                 <a:solidFill>
                   <a:srgbClr val="2B4A7D"/>
                 </a:solidFill>
@@ -3794,6 +3803,29 @@
               <a:t>FileNotFoundError: [Errno 2] No such file or directory: 'data/orderz.csv'</a:t>
             </a:r>
           </a:p>
+        </p:txBody>
+      </p:sp>
+      <p:sp>
+        <p:nvSpPr>
+          <p:cNvPr id="5" name="TextBox 4"/>
+          <p:cNvSpPr txBox="1"/>
+          <p:nvPr/>
+        </p:nvSpPr>
+        <p:spPr>
+          <a:xfrm>
+            <a:off x="777240" y="2807208"/>
+            <a:ext cx="10607040" cy="704088"/>
+          </a:xfrm>
+          <a:prstGeom prst="rect">
+            <a:avLst/>
+          </a:prstGeom>
+          <a:noFill/>
+        </p:spPr>
+        <p:txBody>
+          <a:bodyPr wrap="square">
+            <a:spAutoFit/>
+          </a:bodyPr>
+          <a:lstStyle/>
           <a:p>
             <a:pPr>
               <a:spcAft>
@@ -3801,7 +3833,7 @@
               </a:spcAft>
             </a:pPr>
             <a:r>
-              <a:rPr sz="2100">
+              <a:rPr sz="2100" b="0">
                 <a:solidFill>
                   <a:srgbClr val="1C1C1A"/>
                 </a:solidFill>
@@ -3814,13 +3846,13 @@
       </p:sp>
       <p:sp>
         <p:nvSpPr>
-          <p:cNvPr id="5" name="TextBox 4"/>
-          <p:cNvSpPr txBox="1"/>
-          <p:nvPr/>
-        </p:nvSpPr>
-        <p:spPr>
-          <a:xfrm>
-            <a:off x="777240" y="6263640"/>
+          <p:cNvPr id="6" name="TextBox 5"/>
+          <p:cNvSpPr txBox="1"/>
+          <p:nvPr/>
+        </p:nvSpPr>
+        <p:spPr>
+          <a:xfrm>
+            <a:off x="777240" y="6309360"/>
             <a:ext cx="10607040" cy="365760"/>
           </a:xfrm>
           <a:prstGeom prst="rect">
@@ -3951,7 +3983,7 @@
         <p:spPr>
           <a:xfrm>
             <a:off x="777240" y="1965960"/>
-            <a:ext cx="10607040" cy="4206240"/>
+            <a:ext cx="10607040" cy="1088136"/>
           </a:xfrm>
           <a:prstGeom prst="rect">
             <a:avLst/>
@@ -3970,7 +4002,7 @@
               </a:spcAft>
             </a:pPr>
             <a:r>
-              <a:rPr sz="2100">
+              <a:rPr sz="2100" b="0">
                 <a:solidFill>
                   <a:srgbClr val="1C1C1A"/>
                 </a:solidFill>
@@ -3986,7 +4018,7 @@
               </a:spcAft>
             </a:pPr>
             <a:r>
-              <a:rPr sz="2100">
+              <a:rPr sz="2100" b="0">
                 <a:solidFill>
                   <a:srgbClr val="1C1C1A"/>
                 </a:solidFill>
@@ -4005,7 +4037,7 @@
         </p:nvSpPr>
         <p:spPr>
           <a:xfrm>
-            <a:off x="777240" y="6263640"/>
+            <a:off x="777240" y="6309360"/>
             <a:ext cx="10607040" cy="365760"/>
           </a:xfrm>
           <a:prstGeom prst="rect">
@@ -4136,7 +4168,7 @@
         <p:spPr>
           <a:xfrm>
             <a:off x="777240" y="1965960"/>
-            <a:ext cx="10607040" cy="4206240"/>
+            <a:ext cx="10607040" cy="1088136"/>
           </a:xfrm>
           <a:prstGeom prst="rect">
             <a:avLst/>
@@ -4155,7 +4187,7 @@
               </a:spcAft>
             </a:pPr>
             <a:r>
-              <a:rPr sz="1700">
+              <a:rPr sz="1700" b="0">
                 <a:solidFill>
                   <a:srgbClr val="2B4A7D"/>
                 </a:solidFill>
@@ -4171,7 +4203,7 @@
               </a:spcAft>
             </a:pPr>
             <a:r>
-              <a:rPr sz="1700">
+              <a:rPr sz="1700" b="0">
                 <a:solidFill>
                   <a:srgbClr val="2B4A7D"/>
                 </a:solidFill>
@@ -4180,6 +4212,29 @@
               <a:t>    ...</a:t>
             </a:r>
           </a:p>
+        </p:txBody>
+      </p:sp>
+      <p:sp>
+        <p:nvSpPr>
+          <p:cNvPr id="5" name="TextBox 4"/>
+          <p:cNvSpPr txBox="1"/>
+          <p:nvPr/>
+        </p:nvSpPr>
+        <p:spPr>
+          <a:xfrm>
+            <a:off x="777240" y="3191256"/>
+            <a:ext cx="10607040" cy="704088"/>
+          </a:xfrm>
+          <a:prstGeom prst="rect">
+            <a:avLst/>
+          </a:prstGeom>
+          <a:noFill/>
+        </p:spPr>
+        <p:txBody>
+          <a:bodyPr wrap="square">
+            <a:spAutoFit/>
+          </a:bodyPr>
+          <a:lstStyle/>
           <a:p>
             <a:pPr>
               <a:spcAft>
@@ -4187,7 +4242,7 @@
               </a:spcAft>
             </a:pPr>
             <a:r>
-              <a:rPr sz="2100">
+              <a:rPr sz="2100" b="0">
                 <a:solidFill>
                   <a:srgbClr val="1C1C1A"/>
                 </a:solidFill>
@@ -4200,13 +4255,13 @@
       </p:sp>
       <p:sp>
         <p:nvSpPr>
-          <p:cNvPr id="5" name="TextBox 4"/>
-          <p:cNvSpPr txBox="1"/>
-          <p:nvPr/>
-        </p:nvSpPr>
-        <p:spPr>
-          <a:xfrm>
-            <a:off x="777240" y="6263640"/>
+          <p:cNvPr id="6" name="TextBox 5"/>
+          <p:cNvSpPr txBox="1"/>
+          <p:nvPr/>
+        </p:nvSpPr>
+        <p:spPr>
+          <a:xfrm>
+            <a:off x="777240" y="6309360"/>
             <a:ext cx="10607040" cy="365760"/>
           </a:xfrm>
           <a:prstGeom prst="rect">
@@ -4337,7 +4392,7 @@
         <p:spPr>
           <a:xfrm>
             <a:off x="777240" y="1965960"/>
-            <a:ext cx="10607040" cy="4206240"/>
+            <a:ext cx="10607040" cy="704088"/>
           </a:xfrm>
           <a:prstGeom prst="rect">
             <a:avLst/>
@@ -4356,7 +4411,7 @@
               </a:spcAft>
             </a:pPr>
             <a:r>
-              <a:rPr sz="2100">
+              <a:rPr sz="2100" b="0">
                 <a:solidFill>
                   <a:srgbClr val="1C1C1A"/>
                 </a:solidFill>
@@ -4375,7 +4430,7 @@
         </p:nvSpPr>
         <p:spPr>
           <a:xfrm>
-            <a:off x="777240" y="6263640"/>
+            <a:off x="777240" y="6309360"/>
             <a:ext cx="10607040" cy="365760"/>
           </a:xfrm>
           <a:prstGeom prst="rect">
@@ -4506,7 +4561,7 @@
         <p:spPr>
           <a:xfrm>
             <a:off x="777240" y="1965960"/>
-            <a:ext cx="10607040" cy="4206240"/>
+            <a:ext cx="10607040" cy="1856231"/>
           </a:xfrm>
           <a:prstGeom prst="rect">
             <a:avLst/>
@@ -4525,7 +4580,7 @@
               </a:spcAft>
             </a:pPr>
             <a:r>
-              <a:rPr sz="2100">
+              <a:rPr sz="2100" b="0">
                 <a:solidFill>
                   <a:srgbClr val="1C1C1A"/>
                 </a:solidFill>
@@ -4541,7 +4596,7 @@
               </a:spcAft>
             </a:pPr>
             <a:r>
-              <a:rPr sz="2100">
+              <a:rPr sz="2100" b="0">
                 <a:solidFill>
                   <a:srgbClr val="1C1C1A"/>
                 </a:solidFill>
@@ -4557,7 +4612,7 @@
               </a:spcAft>
             </a:pPr>
             <a:r>
-              <a:rPr sz="2100">
+              <a:rPr sz="2100" b="0">
                 <a:solidFill>
                   <a:srgbClr val="1C1C1A"/>
                 </a:solidFill>
@@ -4573,7 +4628,7 @@
               </a:spcAft>
             </a:pPr>
             <a:r>
-              <a:rPr sz="2100">
+              <a:rPr sz="2100" b="0">
                 <a:solidFill>
                   <a:srgbClr val="1C1C1A"/>
                 </a:solidFill>
@@ -4592,7 +4647,7 @@
         </p:nvSpPr>
         <p:spPr>
           <a:xfrm>
-            <a:off x="777240" y="6263640"/>
+            <a:off x="777240" y="6309360"/>
             <a:ext cx="10607040" cy="365760"/>
           </a:xfrm>
           <a:prstGeom prst="rect">
@@ -4724,7 +4779,7 @@
         <p:spPr>
           <a:xfrm>
             <a:off x="777240" y="1965960"/>
-            <a:ext cx="10607040" cy="4206240"/>
+            <a:ext cx="10607040" cy="704088"/>
           </a:xfrm>
           <a:prstGeom prst="rect">
             <a:avLst/>
@@ -4743,13 +4798,22 @@
               </a:spcAft>
             </a:pPr>
             <a:r>
-              <a:rPr sz="2100">
+              <a:rPr sz="2100" b="0">
                 <a:solidFill>
                   <a:srgbClr val="FFFFFF"/>
                 </a:solidFill>
                 <a:latin typeface="Calibri"/>
               </a:rPr>
-              <a:t>[inline cell] &gt; [packaged decision] &gt; [read the failure] &gt; [log the rejection] &gt; **[cross the boundary]**</a:t>
+              <a:t>[inline cell] &gt; [packaged decision] &gt; [read the failure] &gt; [log the rejection] &gt; </a:t>
+            </a:r>
+            <a:r>
+              <a:rPr sz="2100" b="1">
+                <a:solidFill>
+                  <a:srgbClr val="FFFFFF"/>
+                </a:solidFill>
+                <a:latin typeface="Calibri"/>
+              </a:rPr>
+              <a:t>[cross the boundary]</a:t>
             </a:r>
           </a:p>
         </p:txBody>
@@ -4762,7 +4826,7 @@
         </p:nvSpPr>
         <p:spPr>
           <a:xfrm>
-            <a:off x="777240" y="6263640"/>
+            <a:off x="777240" y="6309360"/>
             <a:ext cx="10607040" cy="365760"/>
           </a:xfrm>
           <a:prstGeom prst="rect">
@@ -4893,7 +4957,7 @@
         <p:spPr>
           <a:xfrm>
             <a:off x="777240" y="1965960"/>
-            <a:ext cx="10607040" cy="4206240"/>
+            <a:ext cx="10607040" cy="704088"/>
           </a:xfrm>
           <a:prstGeom prst="rect">
             <a:avLst/>
@@ -4912,7 +4976,7 @@
               </a:spcAft>
             </a:pPr>
             <a:r>
-              <a:rPr sz="1700">
+              <a:rPr sz="1700" b="0">
                 <a:solidFill>
                   <a:srgbClr val="2B4A7D"/>
                 </a:solidFill>
@@ -4921,6 +4985,29 @@
               <a:t>row[2]</a:t>
             </a:r>
           </a:p>
+        </p:txBody>
+      </p:sp>
+      <p:sp>
+        <p:nvSpPr>
+          <p:cNvPr id="5" name="TextBox 4"/>
+          <p:cNvSpPr txBox="1"/>
+          <p:nvPr/>
+        </p:nvSpPr>
+        <p:spPr>
+          <a:xfrm>
+            <a:off x="777240" y="2807208"/>
+            <a:ext cx="10607040" cy="704088"/>
+          </a:xfrm>
+          <a:prstGeom prst="rect">
+            <a:avLst/>
+          </a:prstGeom>
+          <a:noFill/>
+        </p:spPr>
+        <p:txBody>
+          <a:bodyPr wrap="square">
+            <a:spAutoFit/>
+          </a:bodyPr>
+          <a:lstStyle/>
           <a:p>
             <a:pPr>
               <a:spcAft>
@@ -4928,7 +5015,7 @@
               </a:spcAft>
             </a:pPr>
             <a:r>
-              <a:rPr sz="2100">
+              <a:rPr sz="2100" b="0">
                 <a:solidFill>
                   <a:srgbClr val="1C1C1A"/>
                 </a:solidFill>
@@ -4941,13 +5028,13 @@
       </p:sp>
       <p:sp>
         <p:nvSpPr>
-          <p:cNvPr id="5" name="TextBox 4"/>
-          <p:cNvSpPr txBox="1"/>
-          <p:nvPr/>
-        </p:nvSpPr>
-        <p:spPr>
-          <a:xfrm>
-            <a:off x="777240" y="6263640"/>
+          <p:cNvPr id="6" name="TextBox 5"/>
+          <p:cNvSpPr txBox="1"/>
+          <p:nvPr/>
+        </p:nvSpPr>
+        <p:spPr>
+          <a:xfrm>
+            <a:off x="777240" y="6309360"/>
             <a:ext cx="10607040" cy="365760"/>
           </a:xfrm>
           <a:prstGeom prst="rect">
@@ -5078,7 +5165,7 @@
         <p:spPr>
           <a:xfrm>
             <a:off x="777240" y="1965960"/>
-            <a:ext cx="10607040" cy="4206240"/>
+            <a:ext cx="10607040" cy="2240280"/>
           </a:xfrm>
           <a:prstGeom prst="rect">
             <a:avLst/>
@@ -5097,7 +5184,7 @@
               </a:spcAft>
             </a:pPr>
             <a:r>
-              <a:rPr sz="1700">
+              <a:rPr sz="1700" b="0">
                 <a:solidFill>
                   <a:srgbClr val="2B4A7D"/>
                 </a:solidFill>
@@ -5112,15 +5199,6 @@
                 <a:spcPts val="400"/>
               </a:spcAft>
             </a:pPr>
-            <a:r>
-              <a:rPr sz="1700">
-                <a:solidFill>
-                  <a:srgbClr val="2B4A7D"/>
-                </a:solidFill>
-                <a:latin typeface="Consolas"/>
-              </a:rPr>
-              <a:t>with open("records.csv") as f:</a:t>
-            </a:r>
           </a:p>
           <a:p>
             <a:pPr>
@@ -5129,13 +5207,13 @@
               </a:spcAft>
             </a:pPr>
             <a:r>
-              <a:rPr sz="1700">
+              <a:rPr sz="1700" b="0">
                 <a:solidFill>
                   <a:srgbClr val="2B4A7D"/>
                 </a:solidFill>
                 <a:latin typeface="Consolas"/>
               </a:rPr>
-              <a:t>    for record in csv.DictReader(f):</a:t>
+              <a:t>with open("records.csv") as f:</a:t>
             </a:r>
           </a:p>
           <a:p>
@@ -5145,15 +5223,54 @@
               </a:spcAft>
             </a:pPr>
             <a:r>
-              <a:rPr sz="1700">
+              <a:rPr sz="1700" b="0">
                 <a:solidFill>
                   <a:srgbClr val="2B4A7D"/>
                 </a:solidFill>
                 <a:latin typeface="Consolas"/>
               </a:rPr>
+              <a:t>    for record in csv.DictReader(f):</a:t>
+            </a:r>
+          </a:p>
+          <a:p>
+            <a:pPr>
+              <a:spcAft>
+                <a:spcPts val="400"/>
+              </a:spcAft>
+            </a:pPr>
+            <a:r>
+              <a:rPr sz="1700" b="0">
+                <a:solidFill>
+                  <a:srgbClr val="2B4A7D"/>
+                </a:solidFill>
+                <a:latin typeface="Consolas"/>
+              </a:rPr>
               <a:t>        print(record["amount"])</a:t>
             </a:r>
           </a:p>
+        </p:txBody>
+      </p:sp>
+      <p:sp>
+        <p:nvSpPr>
+          <p:cNvPr id="5" name="TextBox 4"/>
+          <p:cNvSpPr txBox="1"/>
+          <p:nvPr/>
+        </p:nvSpPr>
+        <p:spPr>
+          <a:xfrm>
+            <a:off x="777240" y="4343400"/>
+            <a:ext cx="10607040" cy="704088"/>
+          </a:xfrm>
+          <a:prstGeom prst="rect">
+            <a:avLst/>
+          </a:prstGeom>
+          <a:noFill/>
+        </p:spPr>
+        <p:txBody>
+          <a:bodyPr wrap="square">
+            <a:spAutoFit/>
+          </a:bodyPr>
+          <a:lstStyle/>
           <a:p>
             <a:pPr>
               <a:spcAft>
@@ -5161,7 +5278,7 @@
               </a:spcAft>
             </a:pPr>
             <a:r>
-              <a:rPr sz="2100">
+              <a:rPr sz="2100" b="0">
                 <a:solidFill>
                   <a:srgbClr val="1C1C1A"/>
                 </a:solidFill>
@@ -5174,13 +5291,13 @@
       </p:sp>
       <p:sp>
         <p:nvSpPr>
-          <p:cNvPr id="5" name="TextBox 4"/>
-          <p:cNvSpPr txBox="1"/>
-          <p:nvPr/>
-        </p:nvSpPr>
-        <p:spPr>
-          <a:xfrm>
-            <a:off x="777240" y="6263640"/>
+          <p:cNvPr id="6" name="TextBox 5"/>
+          <p:cNvSpPr txBox="1"/>
+          <p:nvPr/>
+        </p:nvSpPr>
+        <p:spPr>
+          <a:xfrm>
+            <a:off x="777240" y="6309360"/>
             <a:ext cx="10607040" cy="365760"/>
           </a:xfrm>
           <a:prstGeom prst="rect">
@@ -5311,7 +5428,7 @@
         <p:spPr>
           <a:xfrm>
             <a:off x="777240" y="1965960"/>
-            <a:ext cx="10607040" cy="4206240"/>
+            <a:ext cx="10607040" cy="1088136"/>
           </a:xfrm>
           <a:prstGeom prst="rect">
             <a:avLst/>
@@ -5330,13 +5447,22 @@
               </a:spcAft>
             </a:pPr>
             <a:r>
-              <a:rPr sz="2100">
+              <a:rPr sz="2100" b="0">
                 <a:solidFill>
                   <a:srgbClr val="1C1C1A"/>
                 </a:solidFill>
                 <a:latin typeface="Calibri"/>
               </a:rPr>
-              <a:t>[inline cell] &gt; [packaged decision] &gt; [read the failure] &gt; [log the rejection] &gt; **[cross the boundary]**</a:t>
+              <a:t>[inline cell] &gt; [packaged decision] &gt; [read the failure] &gt; [log the rejection] &gt; </a:t>
+            </a:r>
+            <a:r>
+              <a:rPr sz="2100" b="1">
+                <a:solidFill>
+                  <a:srgbClr val="1C1C1A"/>
+                </a:solidFill>
+                <a:latin typeface="Calibri"/>
+              </a:rPr>
+              <a:t>[cross the boundary]</a:t>
             </a:r>
           </a:p>
           <a:p>
@@ -5346,7 +5472,7 @@
               </a:spcAft>
             </a:pPr>
             <a:r>
-              <a:rPr sz="2100">
+              <a:rPr sz="2100" b="0">
                 <a:solidFill>
                   <a:srgbClr val="1C1C1A"/>
                 </a:solidFill>
@@ -5365,7 +5491,7 @@
         </p:nvSpPr>
         <p:spPr>
           <a:xfrm>
-            <a:off x="777240" y="6263640"/>
+            <a:off x="777240" y="6309360"/>
             <a:ext cx="10607040" cy="365760"/>
           </a:xfrm>
           <a:prstGeom prst="rect">
@@ -5496,7 +5622,7 @@
         <p:spPr>
           <a:xfrm>
             <a:off x="777240" y="1965960"/>
-            <a:ext cx="10607040" cy="4206240"/>
+            <a:ext cx="10607040" cy="1088136"/>
           </a:xfrm>
           <a:prstGeom prst="rect">
             <a:avLst/>
@@ -5515,7 +5641,7 @@
               </a:spcAft>
             </a:pPr>
             <a:r>
-              <a:rPr sz="2100">
+              <a:rPr sz="2100" b="0">
                 <a:solidFill>
                   <a:srgbClr val="1C1C1A"/>
                 </a:solidFill>
@@ -5531,7 +5657,7 @@
               </a:spcAft>
             </a:pPr>
             <a:r>
-              <a:rPr sz="2100">
+              <a:rPr sz="2100" b="0">
                 <a:solidFill>
                   <a:srgbClr val="1C1C1A"/>
                 </a:solidFill>
@@ -5550,7 +5676,7 @@
         </p:nvSpPr>
         <p:spPr>
           <a:xfrm>
-            <a:off x="777240" y="6263640"/>
+            <a:off x="777240" y="6309360"/>
             <a:ext cx="10607040" cy="365760"/>
           </a:xfrm>
           <a:prstGeom prst="rect">
@@ -5681,7 +5807,7 @@
         <p:spPr>
           <a:xfrm>
             <a:off x="777240" y="1965960"/>
-            <a:ext cx="10607040" cy="4206240"/>
+            <a:ext cx="10607040" cy="1856231"/>
           </a:xfrm>
           <a:prstGeom prst="rect">
             <a:avLst/>
@@ -5700,7 +5826,7 @@
               </a:spcAft>
             </a:pPr>
             <a:r>
-              <a:rPr sz="2100">
+              <a:rPr sz="2100" b="0">
                 <a:solidFill>
                   <a:srgbClr val="1C1C1A"/>
                 </a:solidFill>
@@ -5716,7 +5842,7 @@
               </a:spcAft>
             </a:pPr>
             <a:r>
-              <a:rPr sz="2100">
+              <a:rPr sz="2100" b="0">
                 <a:solidFill>
                   <a:srgbClr val="1C1C1A"/>
                 </a:solidFill>
@@ -5732,7 +5858,7 @@
               </a:spcAft>
             </a:pPr>
             <a:r>
-              <a:rPr sz="2100">
+              <a:rPr sz="2100" b="0">
                 <a:solidFill>
                   <a:srgbClr val="1C1C1A"/>
                 </a:solidFill>
@@ -5748,7 +5874,7 @@
               </a:spcAft>
             </a:pPr>
             <a:r>
-              <a:rPr sz="2100">
+              <a:rPr sz="2100" b="0">
                 <a:solidFill>
                   <a:srgbClr val="1C1C1A"/>
                 </a:solidFill>
@@ -5767,7 +5893,7 @@
         </p:nvSpPr>
         <p:spPr>
           <a:xfrm>
-            <a:off x="777240" y="6263640"/>
+            <a:off x="777240" y="6309360"/>
             <a:ext cx="10607040" cy="365760"/>
           </a:xfrm>
           <a:prstGeom prst="rect">
@@ -5899,7 +6025,7 @@
         <p:spPr>
           <a:xfrm>
             <a:off x="777240" y="1965960"/>
-            <a:ext cx="10607040" cy="4206240"/>
+            <a:ext cx="10607040" cy="704088"/>
           </a:xfrm>
           <a:prstGeom prst="rect">
             <a:avLst/>
@@ -5918,13 +6044,22 @@
               </a:spcAft>
             </a:pPr>
             <a:r>
-              <a:rPr sz="2100">
+              <a:rPr sz="2100" b="0">
                 <a:solidFill>
                   <a:srgbClr val="FFFFFF"/>
                 </a:solidFill>
                 <a:latin typeface="Calibri"/>
               </a:rPr>
-              <a:t>[inline cell] &gt; [packaged decision] &gt; [read the failure] &gt; [log the rejection] &gt; **[cross the boundary]**</a:t>
+              <a:t>[inline cell] &gt; [packaged decision] &gt; [read the failure] &gt; [log the rejection] &gt; </a:t>
+            </a:r>
+            <a:r>
+              <a:rPr sz="2100" b="1">
+                <a:solidFill>
+                  <a:srgbClr val="FFFFFF"/>
+                </a:solidFill>
+                <a:latin typeface="Calibri"/>
+              </a:rPr>
+              <a:t>[cross the boundary]</a:t>
             </a:r>
           </a:p>
         </p:txBody>
@@ -5937,7 +6072,7 @@
         </p:nvSpPr>
         <p:spPr>
           <a:xfrm>
-            <a:off x="777240" y="6263640"/>
+            <a:off x="777240" y="6309360"/>
             <a:ext cx="10607040" cy="365760"/>
           </a:xfrm>
           <a:prstGeom prst="rect">
@@ -6068,7 +6203,7 @@
         <p:spPr>
           <a:xfrm>
             <a:off x="777240" y="1965960"/>
-            <a:ext cx="10607040" cy="4206240"/>
+            <a:ext cx="10607040" cy="1856231"/>
           </a:xfrm>
           <a:prstGeom prst="rect">
             <a:avLst/>
@@ -6087,7 +6222,7 @@
               </a:spcAft>
             </a:pPr>
             <a:r>
-              <a:rPr sz="1700">
+              <a:rPr sz="1700" b="0">
                 <a:solidFill>
                   <a:srgbClr val="2B4A7D"/>
                 </a:solidFill>
@@ -6102,15 +6237,6 @@
                 <a:spcPts val="400"/>
               </a:spcAft>
             </a:pPr>
-            <a:r>
-              <a:rPr sz="1700">
-                <a:solidFill>
-                  <a:srgbClr val="2B4A7D"/>
-                </a:solidFill>
-                <a:latin typeface="Consolas"/>
-              </a:rPr>
-              <a:t>with open("records.json") as f:</a:t>
-            </a:r>
           </a:p>
           <a:p>
             <a:pPr>
@@ -6119,15 +6245,54 @@
               </a:spcAft>
             </a:pPr>
             <a:r>
-              <a:rPr sz="1700">
+              <a:rPr sz="1700" b="0">
                 <a:solidFill>
                   <a:srgbClr val="2B4A7D"/>
                 </a:solidFill>
                 <a:latin typeface="Consolas"/>
               </a:rPr>
+              <a:t>with open("records.json") as f:</a:t>
+            </a:r>
+          </a:p>
+          <a:p>
+            <a:pPr>
+              <a:spcAft>
+                <a:spcPts val="400"/>
+              </a:spcAft>
+            </a:pPr>
+            <a:r>
+              <a:rPr sz="1700" b="0">
+                <a:solidFill>
+                  <a:srgbClr val="2B4A7D"/>
+                </a:solidFill>
+                <a:latin typeface="Consolas"/>
+              </a:rPr>
               <a:t>    records = json.load(f)</a:t>
             </a:r>
           </a:p>
+        </p:txBody>
+      </p:sp>
+      <p:sp>
+        <p:nvSpPr>
+          <p:cNvPr id="5" name="TextBox 4"/>
+          <p:cNvSpPr txBox="1"/>
+          <p:nvPr/>
+        </p:nvSpPr>
+        <p:spPr>
+          <a:xfrm>
+            <a:off x="777240" y="3959352"/>
+            <a:ext cx="10607040" cy="704088"/>
+          </a:xfrm>
+          <a:prstGeom prst="rect">
+            <a:avLst/>
+          </a:prstGeom>
+          <a:noFill/>
+        </p:spPr>
+        <p:txBody>
+          <a:bodyPr wrap="square">
+            <a:spAutoFit/>
+          </a:bodyPr>
+          <a:lstStyle/>
           <a:p>
             <a:pPr>
               <a:spcAft>
@@ -6135,7 +6300,7 @@
               </a:spcAft>
             </a:pPr>
             <a:r>
-              <a:rPr sz="2100">
+              <a:rPr sz="2100" b="0">
                 <a:solidFill>
                   <a:srgbClr val="1C1C1A"/>
                 </a:solidFill>
@@ -6148,13 +6313,13 @@
       </p:sp>
       <p:sp>
         <p:nvSpPr>
-          <p:cNvPr id="5" name="TextBox 4"/>
-          <p:cNvSpPr txBox="1"/>
-          <p:nvPr/>
-        </p:nvSpPr>
-        <p:spPr>
-          <a:xfrm>
-            <a:off x="777240" y="6263640"/>
+          <p:cNvPr id="6" name="TextBox 5"/>
+          <p:cNvSpPr txBox="1"/>
+          <p:nvPr/>
+        </p:nvSpPr>
+        <p:spPr>
+          <a:xfrm>
+            <a:off x="777240" y="6309360"/>
             <a:ext cx="10607040" cy="365760"/>
           </a:xfrm>
           <a:prstGeom prst="rect">
@@ -6285,7 +6450,7 @@
         <p:spPr>
           <a:xfrm>
             <a:off x="777240" y="1965960"/>
-            <a:ext cx="10607040" cy="4206240"/>
+            <a:ext cx="10607040" cy="2240280"/>
           </a:xfrm>
           <a:prstGeom prst="rect">
             <a:avLst/>
@@ -6304,7 +6469,7 @@
               </a:spcAft>
             </a:pPr>
             <a:r>
-              <a:rPr sz="1700">
+              <a:rPr sz="1700" b="0">
                 <a:solidFill>
                   <a:srgbClr val="2B4A7D"/>
                 </a:solidFill>
@@ -6320,7 +6485,7 @@
               </a:spcAft>
             </a:pPr>
             <a:r>
-              <a:rPr sz="1700">
+              <a:rPr sz="1700" b="0">
                 <a:solidFill>
                   <a:srgbClr val="2B4A7D"/>
                 </a:solidFill>
@@ -6336,7 +6501,7 @@
               </a:spcAft>
             </a:pPr>
             <a:r>
-              <a:rPr sz="1700">
+              <a:rPr sz="1700" b="0">
                 <a:solidFill>
                   <a:srgbClr val="2B4A7D"/>
                 </a:solidFill>
@@ -6352,7 +6517,7 @@
               </a:spcAft>
             </a:pPr>
             <a:r>
-              <a:rPr sz="1700">
+              <a:rPr sz="1700" b="0">
                 <a:solidFill>
                   <a:srgbClr val="2B4A7D"/>
                 </a:solidFill>
@@ -6368,7 +6533,7 @@
               </a:spcAft>
             </a:pPr>
             <a:r>
-              <a:rPr sz="1700">
+              <a:rPr sz="1700" b="0">
                 <a:solidFill>
                   <a:srgbClr val="2B4A7D"/>
                 </a:solidFill>
@@ -6377,6 +6542,29 @@
               <a:t>}</a:t>
             </a:r>
           </a:p>
+        </p:txBody>
+      </p:sp>
+      <p:sp>
+        <p:nvSpPr>
+          <p:cNvPr id="5" name="TextBox 4"/>
+          <p:cNvSpPr txBox="1"/>
+          <p:nvPr/>
+        </p:nvSpPr>
+        <p:spPr>
+          <a:xfrm>
+            <a:off x="777240" y="4343400"/>
+            <a:ext cx="10607040" cy="704088"/>
+          </a:xfrm>
+          <a:prstGeom prst="rect">
+            <a:avLst/>
+          </a:prstGeom>
+          <a:noFill/>
+        </p:spPr>
+        <p:txBody>
+          <a:bodyPr wrap="square">
+            <a:spAutoFit/>
+          </a:bodyPr>
+          <a:lstStyle/>
           <a:p>
             <a:pPr>
               <a:spcAft>
@@ -6384,7 +6572,7 @@
               </a:spcAft>
             </a:pPr>
             <a:r>
-              <a:rPr sz="2100">
+              <a:rPr sz="2100" b="0">
                 <a:solidFill>
                   <a:srgbClr val="1C1C1A"/>
                 </a:solidFill>
@@ -6397,13 +6585,13 @@
       </p:sp>
       <p:sp>
         <p:nvSpPr>
-          <p:cNvPr id="5" name="TextBox 4"/>
-          <p:cNvSpPr txBox="1"/>
-          <p:nvPr/>
-        </p:nvSpPr>
-        <p:spPr>
-          <a:xfrm>
-            <a:off x="777240" y="6263640"/>
+          <p:cNvPr id="6" name="TextBox 5"/>
+          <p:cNvSpPr txBox="1"/>
+          <p:nvPr/>
+        </p:nvSpPr>
+        <p:spPr>
+          <a:xfrm>
+            <a:off x="777240" y="6309360"/>
             <a:ext cx="10607040" cy="365760"/>
           </a:xfrm>
           <a:prstGeom prst="rect">
@@ -6534,7 +6722,7 @@
         <p:spPr>
           <a:xfrm>
             <a:off x="777240" y="1965960"/>
-            <a:ext cx="10607040" cy="4206240"/>
+            <a:ext cx="10607040" cy="1088136"/>
           </a:xfrm>
           <a:prstGeom prst="rect">
             <a:avLst/>
@@ -6553,7 +6741,7 @@
               </a:spcAft>
             </a:pPr>
             <a:r>
-              <a:rPr sz="2100">
+              <a:rPr sz="2100" b="0">
                 <a:solidFill>
                   <a:srgbClr val="1C1C1A"/>
                 </a:solidFill>
@@ -6569,7 +6757,7 @@
               </a:spcAft>
             </a:pPr>
             <a:r>
-              <a:rPr sz="2100">
+              <a:rPr sz="2100" b="0">
                 <a:solidFill>
                   <a:srgbClr val="1C1C1A"/>
                 </a:solidFill>
@@ -6588,7 +6776,7 @@
         </p:nvSpPr>
         <p:spPr>
           <a:xfrm>
-            <a:off x="777240" y="6263640"/>
+            <a:off x="777240" y="6309360"/>
             <a:ext cx="10607040" cy="365760"/>
           </a:xfrm>
           <a:prstGeom prst="rect">
@@ -6719,7 +6907,7 @@
         <p:spPr>
           <a:xfrm>
             <a:off x="777240" y="1965960"/>
-            <a:ext cx="10607040" cy="4206240"/>
+            <a:ext cx="10607040" cy="1088136"/>
           </a:xfrm>
           <a:prstGeom prst="rect">
             <a:avLst/>
@@ -6738,7 +6926,7 @@
               </a:spcAft>
             </a:pPr>
             <a:r>
-              <a:rPr sz="2100">
+              <a:rPr sz="2100" b="0">
                 <a:solidFill>
                   <a:srgbClr val="1C1C1A"/>
                 </a:solidFill>
@@ -6754,7 +6942,7 @@
               </a:spcAft>
             </a:pPr>
             <a:r>
-              <a:rPr sz="2100">
+              <a:rPr sz="2100" b="0">
                 <a:solidFill>
                   <a:srgbClr val="1C1C1A"/>
                 </a:solidFill>
@@ -6773,7 +6961,7 @@
         </p:nvSpPr>
         <p:spPr>
           <a:xfrm>
-            <a:off x="777240" y="6263640"/>
+            <a:off x="777240" y="6309360"/>
             <a:ext cx="10607040" cy="365760"/>
           </a:xfrm>
           <a:prstGeom prst="rect">
@@ -6904,7 +7092,7 @@
         <p:spPr>
           <a:xfrm>
             <a:off x="777240" y="1965960"/>
-            <a:ext cx="10607040" cy="4206240"/>
+            <a:ext cx="10607040" cy="1856231"/>
           </a:xfrm>
           <a:prstGeom prst="rect">
             <a:avLst/>
@@ -6923,7 +7111,7 @@
               </a:spcAft>
             </a:pPr>
             <a:r>
-              <a:rPr sz="2100">
+              <a:rPr sz="2100" b="0">
                 <a:solidFill>
                   <a:srgbClr val="1C1C1A"/>
                 </a:solidFill>
@@ -6939,7 +7127,7 @@
               </a:spcAft>
             </a:pPr>
             <a:r>
-              <a:rPr sz="2100">
+              <a:rPr sz="2100" b="0">
                 <a:solidFill>
                   <a:srgbClr val="1C1C1A"/>
                 </a:solidFill>
@@ -6955,7 +7143,7 @@
               </a:spcAft>
             </a:pPr>
             <a:r>
-              <a:rPr sz="2100">
+              <a:rPr sz="2100" b="0">
                 <a:solidFill>
                   <a:srgbClr val="1C1C1A"/>
                 </a:solidFill>
@@ -6971,7 +7159,7 @@
               </a:spcAft>
             </a:pPr>
             <a:r>
-              <a:rPr sz="2100">
+              <a:rPr sz="2100" b="0">
                 <a:solidFill>
                   <a:srgbClr val="1C1C1A"/>
                 </a:solidFill>
@@ -6990,7 +7178,7 @@
         </p:nvSpPr>
         <p:spPr>
           <a:xfrm>
-            <a:off x="777240" y="6263640"/>
+            <a:off x="777240" y="6309360"/>
             <a:ext cx="10607040" cy="365760"/>
           </a:xfrm>
           <a:prstGeom prst="rect">
@@ -7122,7 +7310,7 @@
         <p:spPr>
           <a:xfrm>
             <a:off x="777240" y="1965960"/>
-            <a:ext cx="10607040" cy="4206240"/>
+            <a:ext cx="10607040" cy="704088"/>
           </a:xfrm>
           <a:prstGeom prst="rect">
             <a:avLst/>
@@ -7141,13 +7329,22 @@
               </a:spcAft>
             </a:pPr>
             <a:r>
-              <a:rPr sz="2100">
+              <a:rPr sz="2100" b="0">
                 <a:solidFill>
                   <a:srgbClr val="FFFFFF"/>
                 </a:solidFill>
                 <a:latin typeface="Calibri"/>
               </a:rPr>
-              <a:t>[inline cell] &gt; [packaged decision] &gt; [read the failure] &gt; [log the rejection] &gt; **[cross the boundary]**</a:t>
+              <a:t>[inline cell] &gt; [packaged decision] &gt; [read the failure] &gt; [log the rejection] &gt; </a:t>
+            </a:r>
+            <a:r>
+              <a:rPr sz="2100" b="1">
+                <a:solidFill>
+                  <a:srgbClr val="FFFFFF"/>
+                </a:solidFill>
+                <a:latin typeface="Calibri"/>
+              </a:rPr>
+              <a:t>[cross the boundary]</a:t>
             </a:r>
           </a:p>
         </p:txBody>
@@ -7160,7 +7357,7 @@
         </p:nvSpPr>
         <p:spPr>
           <a:xfrm>
-            <a:off x="777240" y="6263640"/>
+            <a:off x="777240" y="6309360"/>
             <a:ext cx="10607040" cy="365760"/>
           </a:xfrm>
           <a:prstGeom prst="rect">
@@ -7291,7 +7488,7 @@
         <p:spPr>
           <a:xfrm>
             <a:off x="777240" y="1965960"/>
-            <a:ext cx="10607040" cy="4206240"/>
+            <a:ext cx="10607040" cy="1088136"/>
           </a:xfrm>
           <a:prstGeom prst="rect">
             <a:avLst/>
@@ -7310,7 +7507,7 @@
               </a:spcAft>
             </a:pPr>
             <a:r>
-              <a:rPr sz="1700">
+              <a:rPr sz="1700" b="0">
                 <a:solidFill>
                   <a:srgbClr val="2B4A7D"/>
                 </a:solidFill>
@@ -7326,7 +7523,7 @@
               </a:spcAft>
             </a:pPr>
             <a:r>
-              <a:rPr sz="1700">
+              <a:rPr sz="1700" b="0">
                 <a:solidFill>
                   <a:srgbClr val="2B4A7D"/>
                 </a:solidFill>
@@ -7335,6 +7532,29 @@
               <a:t>rejects.csv   the records that did not, and why</a:t>
             </a:r>
           </a:p>
+        </p:txBody>
+      </p:sp>
+      <p:sp>
+        <p:nvSpPr>
+          <p:cNvPr id="5" name="TextBox 4"/>
+          <p:cNvSpPr txBox="1"/>
+          <p:nvPr/>
+        </p:nvSpPr>
+        <p:spPr>
+          <a:xfrm>
+            <a:off x="777240" y="3191256"/>
+            <a:ext cx="10607040" cy="704088"/>
+          </a:xfrm>
+          <a:prstGeom prst="rect">
+            <a:avLst/>
+          </a:prstGeom>
+          <a:noFill/>
+        </p:spPr>
+        <p:txBody>
+          <a:bodyPr wrap="square">
+            <a:spAutoFit/>
+          </a:bodyPr>
+          <a:lstStyle/>
           <a:p>
             <a:pPr>
               <a:spcAft>
@@ -7342,7 +7562,7 @@
               </a:spcAft>
             </a:pPr>
             <a:r>
-              <a:rPr sz="2100">
+              <a:rPr sz="2100" b="0">
                 <a:solidFill>
                   <a:srgbClr val="1C1C1A"/>
                 </a:solidFill>
@@ -7355,13 +7575,13 @@
       </p:sp>
       <p:sp>
         <p:nvSpPr>
-          <p:cNvPr id="5" name="TextBox 4"/>
-          <p:cNvSpPr txBox="1"/>
-          <p:nvPr/>
-        </p:nvSpPr>
-        <p:spPr>
-          <a:xfrm>
-            <a:off x="777240" y="6263640"/>
+          <p:cNvPr id="6" name="TextBox 5"/>
+          <p:cNvSpPr txBox="1"/>
+          <p:nvPr/>
+        </p:nvSpPr>
+        <p:spPr>
+          <a:xfrm>
+            <a:off x="777240" y="6309360"/>
             <a:ext cx="10607040" cy="365760"/>
           </a:xfrm>
           <a:prstGeom prst="rect">
@@ -7492,7 +7712,7 @@
         <p:spPr>
           <a:xfrm>
             <a:off x="777240" y="1965960"/>
-            <a:ext cx="10607040" cy="4206240"/>
+            <a:ext cx="10607040" cy="1088136"/>
           </a:xfrm>
           <a:prstGeom prst="rect">
             <a:avLst/>
@@ -7511,7 +7731,7 @@
               </a:spcAft>
             </a:pPr>
             <a:r>
-              <a:rPr sz="2100">
+              <a:rPr sz="2100" b="0">
                 <a:solidFill>
                   <a:srgbClr val="1C1C1A"/>
                 </a:solidFill>
@@ -7527,7 +7747,7 @@
               </a:spcAft>
             </a:pPr>
             <a:r>
-              <a:rPr sz="2100">
+              <a:rPr sz="2100" b="0">
                 <a:solidFill>
                   <a:srgbClr val="1C1C1A"/>
                 </a:solidFill>
@@ -7546,7 +7766,7 @@
         </p:nvSpPr>
         <p:spPr>
           <a:xfrm>
-            <a:off x="777240" y="6263640"/>
+            <a:off x="777240" y="6309360"/>
             <a:ext cx="10607040" cy="365760"/>
           </a:xfrm>
           <a:prstGeom prst="rect">
@@ -7677,7 +7897,7 @@
         <p:spPr>
           <a:xfrm>
             <a:off x="777240" y="1965960"/>
-            <a:ext cx="10607040" cy="4206240"/>
+            <a:ext cx="10607040" cy="1472184"/>
           </a:xfrm>
           <a:prstGeom prst="rect">
             <a:avLst/>
@@ -7696,7 +7916,7 @@
               </a:spcAft>
             </a:pPr>
             <a:r>
-              <a:rPr sz="1700">
+              <a:rPr sz="1700" b="0">
                 <a:solidFill>
                   <a:srgbClr val="2B4A7D"/>
                 </a:solidFill>
@@ -7712,7 +7932,7 @@
               </a:spcAft>
             </a:pPr>
             <a:r>
-              <a:rPr sz="1700">
+              <a:rPr sz="1700" b="0">
                 <a:solidFill>
                   <a:srgbClr val="2B4A7D"/>
                 </a:solidFill>
@@ -7728,7 +7948,7 @@
               </a:spcAft>
             </a:pPr>
             <a:r>
-              <a:rPr sz="1700">
+              <a:rPr sz="1700" b="0">
                 <a:solidFill>
                   <a:srgbClr val="2B4A7D"/>
                 </a:solidFill>
@@ -7737,6 +7957,29 @@
               <a:t>writer.writerows(clean)</a:t>
             </a:r>
           </a:p>
+        </p:txBody>
+      </p:sp>
+      <p:sp>
+        <p:nvSpPr>
+          <p:cNvPr id="5" name="TextBox 4"/>
+          <p:cNvSpPr txBox="1"/>
+          <p:nvPr/>
+        </p:nvSpPr>
+        <p:spPr>
+          <a:xfrm>
+            <a:off x="777240" y="3575303"/>
+            <a:ext cx="10607040" cy="704088"/>
+          </a:xfrm>
+          <a:prstGeom prst="rect">
+            <a:avLst/>
+          </a:prstGeom>
+          <a:noFill/>
+        </p:spPr>
+        <p:txBody>
+          <a:bodyPr wrap="square">
+            <a:spAutoFit/>
+          </a:bodyPr>
+          <a:lstStyle/>
           <a:p>
             <a:pPr>
               <a:spcAft>
@@ -7744,7 +7987,7 @@
               </a:spcAft>
             </a:pPr>
             <a:r>
-              <a:rPr sz="2100">
+              <a:rPr sz="2100" b="0">
                 <a:solidFill>
                   <a:srgbClr val="1C1C1A"/>
                 </a:solidFill>
@@ -7757,13 +8000,13 @@
       </p:sp>
       <p:sp>
         <p:nvSpPr>
-          <p:cNvPr id="5" name="TextBox 4"/>
-          <p:cNvSpPr txBox="1"/>
-          <p:nvPr/>
-        </p:nvSpPr>
-        <p:spPr>
-          <a:xfrm>
-            <a:off x="777240" y="6263640"/>
+          <p:cNvPr id="6" name="TextBox 5"/>
+          <p:cNvSpPr txBox="1"/>
+          <p:nvPr/>
+        </p:nvSpPr>
+        <p:spPr>
+          <a:xfrm>
+            <a:off x="777240" y="6309360"/>
             <a:ext cx="10607040" cy="365760"/>
           </a:xfrm>
           <a:prstGeom prst="rect">
@@ -7894,7 +8137,7 @@
         <p:spPr>
           <a:xfrm>
             <a:off x="777240" y="1965960"/>
-            <a:ext cx="10607040" cy="4206240"/>
+            <a:ext cx="10607040" cy="1088136"/>
           </a:xfrm>
           <a:prstGeom prst="rect">
             <a:avLst/>
@@ -7913,7 +8156,7 @@
               </a:spcAft>
             </a:pPr>
             <a:r>
-              <a:rPr sz="2100">
+              <a:rPr sz="2100" b="0">
                 <a:solidFill>
                   <a:srgbClr val="1C1C1A"/>
                 </a:solidFill>
@@ -7929,7 +8172,7 @@
               </a:spcAft>
             </a:pPr>
             <a:r>
-              <a:rPr sz="2100">
+              <a:rPr sz="2100" b="0">
                 <a:solidFill>
                   <a:srgbClr val="1C1C1A"/>
                 </a:solidFill>
@@ -7948,7 +8191,7 @@
         </p:nvSpPr>
         <p:spPr>
           <a:xfrm>
-            <a:off x="777240" y="6263640"/>
+            <a:off x="777240" y="6309360"/>
             <a:ext cx="10607040" cy="365760"/>
           </a:xfrm>
           <a:prstGeom prst="rect">
@@ -8079,7 +8322,7 @@
         <p:spPr>
           <a:xfrm>
             <a:off x="777240" y="1965960"/>
-            <a:ext cx="10607040" cy="4206240"/>
+            <a:ext cx="10607040" cy="1472184"/>
           </a:xfrm>
           <a:prstGeom prst="rect">
             <a:avLst/>
@@ -8098,7 +8341,7 @@
               </a:spcAft>
             </a:pPr>
             <a:r>
-              <a:rPr sz="2100">
+              <a:rPr sz="2100" b="0">
                 <a:solidFill>
                   <a:srgbClr val="1C1C1A"/>
                 </a:solidFill>
@@ -8114,7 +8357,7 @@
               </a:spcAft>
             </a:pPr>
             <a:r>
-              <a:rPr sz="2100">
+              <a:rPr sz="2100" b="0">
                 <a:solidFill>
                   <a:srgbClr val="1C1C1A"/>
                 </a:solidFill>
@@ -8130,7 +8373,7 @@
               </a:spcAft>
             </a:pPr>
             <a:r>
-              <a:rPr sz="2100">
+              <a:rPr sz="2100" b="0">
                 <a:solidFill>
                   <a:srgbClr val="1C1C1A"/>
                 </a:solidFill>
@@ -8149,7 +8392,7 @@
         </p:nvSpPr>
         <p:spPr>
           <a:xfrm>
-            <a:off x="777240" y="6263640"/>
+            <a:off x="777240" y="6309360"/>
             <a:ext cx="10607040" cy="365760"/>
           </a:xfrm>
           <a:prstGeom prst="rect">
@@ -8280,7 +8523,7 @@
         <p:spPr>
           <a:xfrm>
             <a:off x="777240" y="1965960"/>
-            <a:ext cx="10607040" cy="4206240"/>
+            <a:ext cx="10607040" cy="1088136"/>
           </a:xfrm>
           <a:prstGeom prst="rect">
             <a:avLst/>
@@ -8299,7 +8542,7 @@
               </a:spcAft>
             </a:pPr>
             <a:r>
-              <a:rPr sz="2100">
+              <a:rPr sz="2100" b="0">
                 <a:solidFill>
                   <a:srgbClr val="1C1C1A"/>
                 </a:solidFill>
@@ -8315,7 +8558,7 @@
               </a:spcAft>
             </a:pPr>
             <a:r>
-              <a:rPr sz="2100">
+              <a:rPr sz="2100" b="0">
                 <a:solidFill>
                   <a:srgbClr val="1C1C1A"/>
                 </a:solidFill>
@@ -8334,7 +8577,7 @@
         </p:nvSpPr>
         <p:spPr>
           <a:xfrm>
-            <a:off x="777240" y="6263640"/>
+            <a:off x="777240" y="6309360"/>
             <a:ext cx="10607040" cy="365760"/>
           </a:xfrm>
           <a:prstGeom prst="rect">
@@ -8465,7 +8708,7 @@
         <p:spPr>
           <a:xfrm>
             <a:off x="777240" y="1965960"/>
-            <a:ext cx="10607040" cy="4206240"/>
+            <a:ext cx="10607040" cy="1856231"/>
           </a:xfrm>
           <a:prstGeom prst="rect">
             <a:avLst/>
@@ -8484,7 +8727,7 @@
               </a:spcAft>
             </a:pPr>
             <a:r>
-              <a:rPr sz="2100">
+              <a:rPr sz="2100" b="0">
                 <a:solidFill>
                   <a:srgbClr val="1C1C1A"/>
                 </a:solidFill>
@@ -8500,7 +8743,7 @@
               </a:spcAft>
             </a:pPr>
             <a:r>
-              <a:rPr sz="2100">
+              <a:rPr sz="2100" b="0">
                 <a:solidFill>
                   <a:srgbClr val="1C1C1A"/>
                 </a:solidFill>
@@ -8516,7 +8759,7 @@
               </a:spcAft>
             </a:pPr>
             <a:r>
-              <a:rPr sz="2100">
+              <a:rPr sz="2100" b="0">
                 <a:solidFill>
                   <a:srgbClr val="1C1C1A"/>
                 </a:solidFill>
@@ -8532,7 +8775,7 @@
               </a:spcAft>
             </a:pPr>
             <a:r>
-              <a:rPr sz="2100">
+              <a:rPr sz="2100" b="0">
                 <a:solidFill>
                   <a:srgbClr val="1C1C1A"/>
                 </a:solidFill>
@@ -8551,7 +8794,7 @@
         </p:nvSpPr>
         <p:spPr>
           <a:xfrm>
-            <a:off x="777240" y="6263640"/>
+            <a:off x="777240" y="6309360"/>
             <a:ext cx="10607040" cy="365760"/>
           </a:xfrm>
           <a:prstGeom prst="rect">
@@ -8682,7 +8925,7 @@
         <p:spPr>
           <a:xfrm>
             <a:off x="777240" y="1965960"/>
-            <a:ext cx="10607040" cy="4206240"/>
+            <a:ext cx="10607040" cy="704088"/>
           </a:xfrm>
           <a:prstGeom prst="rect">
             <a:avLst/>
@@ -8701,7 +8944,7 @@
               </a:spcAft>
             </a:pPr>
             <a:r>
-              <a:rPr sz="2100">
+              <a:rPr sz="2100" b="0">
                 <a:solidFill>
                   <a:srgbClr val="1C1C1A"/>
                 </a:solidFill>
@@ -8720,7 +8963,7 @@
         </p:nvSpPr>
         <p:spPr>
           <a:xfrm>
-            <a:off x="777240" y="6263640"/>
+            <a:off x="777240" y="6309360"/>
             <a:ext cx="10607040" cy="365760"/>
           </a:xfrm>
           <a:prstGeom prst="rect">
@@ -8851,7 +9094,7 @@
         <p:spPr>
           <a:xfrm>
             <a:off x="777240" y="1965960"/>
-            <a:ext cx="10607040" cy="4206240"/>
+            <a:ext cx="10607040" cy="1088136"/>
           </a:xfrm>
           <a:prstGeom prst="rect">
             <a:avLst/>
@@ -8870,7 +9113,7 @@
               </a:spcAft>
             </a:pPr>
             <a:r>
-              <a:rPr sz="2100">
+              <a:rPr sz="2100" b="0">
                 <a:solidFill>
                   <a:srgbClr val="1C1C1A"/>
                 </a:solidFill>
@@ -8886,7 +9129,7 @@
               </a:spcAft>
             </a:pPr>
             <a:r>
-              <a:rPr sz="2100">
+              <a:rPr sz="2100" b="0">
                 <a:solidFill>
                   <a:srgbClr val="1C1C1A"/>
                 </a:solidFill>
@@ -8905,7 +9148,7 @@
         </p:nvSpPr>
         <p:spPr>
           <a:xfrm>
-            <a:off x="777240" y="6263640"/>
+            <a:off x="777240" y="6309360"/>
             <a:ext cx="10607040" cy="365760"/>
           </a:xfrm>
           <a:prstGeom prst="rect">
@@ -9036,7 +9279,7 @@
         <p:spPr>
           <a:xfrm>
             <a:off x="777240" y="1965960"/>
-            <a:ext cx="10607040" cy="4206240"/>
+            <a:ext cx="10607040" cy="1088136"/>
           </a:xfrm>
           <a:prstGeom prst="rect">
             <a:avLst/>
@@ -9055,7 +9298,7 @@
               </a:spcAft>
             </a:pPr>
             <a:r>
-              <a:rPr sz="2100">
+              <a:rPr sz="2100" b="0">
                 <a:solidFill>
                   <a:srgbClr val="1C1C1A"/>
                 </a:solidFill>
@@ -9071,7 +9314,7 @@
               </a:spcAft>
             </a:pPr>
             <a:r>
-              <a:rPr sz="2100">
+              <a:rPr sz="2100" b="0">
                 <a:solidFill>
                   <a:srgbClr val="1C1C1A"/>
                 </a:solidFill>
@@ -9090,7 +9333,7 @@
         </p:nvSpPr>
         <p:spPr>
           <a:xfrm>
-            <a:off x="777240" y="6263640"/>
+            <a:off x="777240" y="6309360"/>
             <a:ext cx="10607040" cy="365760"/>
           </a:xfrm>
           <a:prstGeom prst="rect">
@@ -9222,7 +9465,7 @@
         <p:spPr>
           <a:xfrm>
             <a:off x="777240" y="1965960"/>
-            <a:ext cx="10607040" cy="4206240"/>
+            <a:ext cx="10607040" cy="704088"/>
           </a:xfrm>
           <a:prstGeom prst="rect">
             <a:avLst/>
@@ -9241,13 +9484,22 @@
               </a:spcAft>
             </a:pPr>
             <a:r>
-              <a:rPr sz="2100">
+              <a:rPr sz="2100" b="0">
                 <a:solidFill>
                   <a:srgbClr val="FFFFFF"/>
                 </a:solidFill>
                 <a:latin typeface="Calibri"/>
               </a:rPr>
-              <a:t>[inline cell] &gt; [packaged decision] &gt; [read the failure] &gt; [log the rejection] &gt; **[cross the boundary]**</a:t>
+              <a:t>[inline cell] &gt; [packaged decision] &gt; [read the failure] &gt; [log the rejection] &gt; </a:t>
+            </a:r>
+            <a:r>
+              <a:rPr sz="2100" b="1">
+                <a:solidFill>
+                  <a:srgbClr val="FFFFFF"/>
+                </a:solidFill>
+                <a:latin typeface="Calibri"/>
+              </a:rPr>
+              <a:t>[cross the boundary]</a:t>
             </a:r>
           </a:p>
         </p:txBody>
@@ -9260,7 +9512,7 @@
         </p:nvSpPr>
         <p:spPr>
           <a:xfrm>
-            <a:off x="777240" y="6263640"/>
+            <a:off x="777240" y="6309360"/>
             <a:ext cx="10607040" cy="365760"/>
           </a:xfrm>
           <a:prstGeom prst="rect">
@@ -9391,7 +9643,7 @@
         <p:spPr>
           <a:xfrm>
             <a:off x="777240" y="1965960"/>
-            <a:ext cx="10607040" cy="4206240"/>
+            <a:ext cx="10607040" cy="1472184"/>
           </a:xfrm>
           <a:prstGeom prst="rect">
             <a:avLst/>
@@ -9410,7 +9662,7 @@
               </a:spcAft>
             </a:pPr>
             <a:r>
-              <a:rPr sz="2100">
+              <a:rPr sz="2100" b="0">
                 <a:solidFill>
                   <a:srgbClr val="1C1C1A"/>
                 </a:solidFill>
@@ -9426,7 +9678,7 @@
               </a:spcAft>
             </a:pPr>
             <a:r>
-              <a:rPr sz="2100">
+              <a:rPr sz="2100" b="0">
                 <a:solidFill>
                   <a:srgbClr val="1C1C1A"/>
                 </a:solidFill>
@@ -9442,7 +9694,7 @@
               </a:spcAft>
             </a:pPr>
             <a:r>
-              <a:rPr sz="2100">
+              <a:rPr sz="2100" b="0">
                 <a:solidFill>
                   <a:srgbClr val="1C1C1A"/>
                 </a:solidFill>
@@ -9461,7 +9713,7 @@
         </p:nvSpPr>
         <p:spPr>
           <a:xfrm>
-            <a:off x="777240" y="6263640"/>
+            <a:off x="777240" y="6309360"/>
             <a:ext cx="10607040" cy="365760"/>
           </a:xfrm>
           <a:prstGeom prst="rect">
@@ -9592,7 +9844,7 @@
         <p:spPr>
           <a:xfrm>
             <a:off x="777240" y="1965960"/>
-            <a:ext cx="10607040" cy="4206240"/>
+            <a:ext cx="10607040" cy="704088"/>
           </a:xfrm>
           <a:prstGeom prst="rect">
             <a:avLst/>
@@ -9611,7 +9863,7 @@
               </a:spcAft>
             </a:pPr>
             <a:r>
-              <a:rPr sz="2100">
+              <a:rPr sz="2100" b="0">
                 <a:solidFill>
                   <a:srgbClr val="1C1C1A"/>
                 </a:solidFill>
@@ -9620,6 +9872,29 @@
               <a:t>Everything you read from a CSV is a string.</a:t>
             </a:r>
           </a:p>
+        </p:txBody>
+      </p:sp>
+      <p:sp>
+        <p:nvSpPr>
+          <p:cNvPr id="5" name="TextBox 4"/>
+          <p:cNvSpPr txBox="1"/>
+          <p:nvPr/>
+        </p:nvSpPr>
+        <p:spPr>
+          <a:xfrm>
+            <a:off x="777240" y="2807208"/>
+            <a:ext cx="10607040" cy="1472184"/>
+          </a:xfrm>
+          <a:prstGeom prst="rect">
+            <a:avLst/>
+          </a:prstGeom>
+          <a:noFill/>
+        </p:spPr>
+        <p:txBody>
+          <a:bodyPr wrap="square">
+            <a:spAutoFit/>
+          </a:bodyPr>
+          <a:lstStyle/>
           <a:p>
             <a:pPr>
               <a:spcAft>
@@ -9627,7 +9902,7 @@
               </a:spcAft>
             </a:pPr>
             <a:r>
-              <a:rPr sz="1700">
+              <a:rPr sz="1700" b="0">
                 <a:solidFill>
                   <a:srgbClr val="2B4A7D"/>
                 </a:solidFill>
@@ -9643,7 +9918,7 @@
               </a:spcAft>
             </a:pPr>
             <a:r>
-              <a:rPr sz="1700">
+              <a:rPr sz="1700" b="0">
                 <a:solidFill>
                   <a:srgbClr val="2B4A7D"/>
                 </a:solidFill>
@@ -9659,7 +9934,7 @@
               </a:spcAft>
             </a:pPr>
             <a:r>
-              <a:rPr sz="1700">
+              <a:rPr sz="1700" b="0">
                 <a:solidFill>
                   <a:srgbClr val="2B4A7D"/>
                 </a:solidFill>
@@ -9668,6 +9943,29 @@
               <a:t>(empty)   becomes   ""</a:t>
             </a:r>
           </a:p>
+        </p:txBody>
+      </p:sp>
+      <p:sp>
+        <p:nvSpPr>
+          <p:cNvPr id="6" name="TextBox 5"/>
+          <p:cNvSpPr txBox="1"/>
+          <p:nvPr/>
+        </p:nvSpPr>
+        <p:spPr>
+          <a:xfrm>
+            <a:off x="777240" y="4416552"/>
+            <a:ext cx="10607040" cy="704088"/>
+          </a:xfrm>
+          <a:prstGeom prst="rect">
+            <a:avLst/>
+          </a:prstGeom>
+          <a:noFill/>
+        </p:spPr>
+        <p:txBody>
+          <a:bodyPr wrap="square">
+            <a:spAutoFit/>
+          </a:bodyPr>
+          <a:lstStyle/>
           <a:p>
             <a:pPr>
               <a:spcAft>
@@ -9675,7 +9973,7 @@
               </a:spcAft>
             </a:pPr>
             <a:r>
-              <a:rPr sz="2100">
+              <a:rPr sz="2100" b="0">
                 <a:solidFill>
                   <a:srgbClr val="1C1C1A"/>
                 </a:solidFill>
@@ -9688,13 +9986,13 @@
       </p:sp>
       <p:sp>
         <p:nvSpPr>
-          <p:cNvPr id="5" name="TextBox 4"/>
-          <p:cNvSpPr txBox="1"/>
-          <p:nvPr/>
-        </p:nvSpPr>
-        <p:spPr>
-          <a:xfrm>
-            <a:off x="777240" y="6263640"/>
+          <p:cNvPr id="7" name="TextBox 6"/>
+          <p:cNvSpPr txBox="1"/>
+          <p:nvPr/>
+        </p:nvSpPr>
+        <p:spPr>
+          <a:xfrm>
+            <a:off x="777240" y="6309360"/>
             <a:ext cx="10607040" cy="365760"/>
           </a:xfrm>
           <a:prstGeom prst="rect">
@@ -9825,7 +10123,7 @@
         <p:spPr>
           <a:xfrm>
             <a:off x="777240" y="1965960"/>
-            <a:ext cx="10607040" cy="4206240"/>
+            <a:ext cx="10607040" cy="1088136"/>
           </a:xfrm>
           <a:prstGeom prst="rect">
             <a:avLst/>
@@ -9844,7 +10142,7 @@
               </a:spcAft>
             </a:pPr>
             <a:r>
-              <a:rPr sz="2100">
+              <a:rPr sz="2100" b="0">
                 <a:solidFill>
                   <a:srgbClr val="1C1C1A"/>
                 </a:solidFill>
@@ -9860,7 +10158,7 @@
               </a:spcAft>
             </a:pPr>
             <a:r>
-              <a:rPr sz="2100">
+              <a:rPr sz="2100" b="0">
                 <a:solidFill>
                   <a:srgbClr val="1C1C1A"/>
                 </a:solidFill>
@@ -9879,7 +10177,7 @@
         </p:nvSpPr>
         <p:spPr>
           <a:xfrm>
-            <a:off x="777240" y="6263640"/>
+            <a:off x="777240" y="6309360"/>
             <a:ext cx="10607040" cy="365760"/>
           </a:xfrm>
           <a:prstGeom prst="rect">
@@ -10010,7 +10308,7 @@
         <p:spPr>
           <a:xfrm>
             <a:off x="777240" y="1965960"/>
-            <a:ext cx="10607040" cy="4206240"/>
+            <a:ext cx="10607040" cy="1088136"/>
           </a:xfrm>
           <a:prstGeom prst="rect">
             <a:avLst/>
@@ -10029,7 +10327,7 @@
               </a:spcAft>
             </a:pPr>
             <a:r>
-              <a:rPr sz="2100">
+              <a:rPr sz="2100" b="0">
                 <a:solidFill>
                   <a:srgbClr val="1C1C1A"/>
                 </a:solidFill>
@@ -10045,7 +10343,7 @@
               </a:spcAft>
             </a:pPr>
             <a:r>
-              <a:rPr sz="2100">
+              <a:rPr sz="2100" b="0">
                 <a:solidFill>
                   <a:srgbClr val="1C1C1A"/>
                 </a:solidFill>
@@ -10064,7 +10362,7 @@
         </p:nvSpPr>
         <p:spPr>
           <a:xfrm>
-            <a:off x="777240" y="6263640"/>
+            <a:off x="777240" y="6309360"/>
             <a:ext cx="10607040" cy="365760"/>
           </a:xfrm>
           <a:prstGeom prst="rect">
